--- a/inst/extdata/hv_ppt_template_slate.pptx
+++ b/inst/extdata/hv_ppt_template_slate.pptx
@@ -1895,12 +1895,12 @@
           <a:solidFill>
             <a:srgbClr val="FFFFFF"/>
           </a:solidFill>
-          <a:latin typeface="Arial"/>
           <a:effectLst>
             <a:outerShdw blurRad="38100" dist="38100" dir="2700000" algn="tl">
               <a:srgbClr val="000000"/>
             </a:outerShdw>
           </a:effectLst>
+          <a:latin typeface="Arial"/>
           <a:ea typeface="+mj-ea"/>
           <a:cs typeface="+mj-cs"/>
         </a:defRPr>
